--- a/prompt_engineering/project_task_decomposition_coding/notes.pptx
+++ b/prompt_engineering/project_task_decomposition_coding/notes.pptx
@@ -213,7 +213,7 @@
           <a:p>
             <a:fld id="{7BAEECA8-D063-486F-AE31-5020270C1449}" type="datetimeFigureOut">
               <a:rPr lang="en-US" smtClean="0"/>
-              <a:t>7/6/2026</a:t>
+              <a:t>8/25/2026</a:t>
             </a:fld>
             <a:endParaRPr lang="en-US"/>
           </a:p>
@@ -455,7 +455,7 @@
           <a:p>
             <a:fld id="{6383FAE1-13DE-4511-8C1B-C8AFB720664C}" type="datetimeFigureOut">
               <a:rPr lang="en-US" smtClean="0"/>
-              <a:t>7/6/2026</a:t>
+              <a:t>8/25/2026</a:t>
             </a:fld>
             <a:endParaRPr lang="en-US"/>
           </a:p>
@@ -653,7 +653,7 @@
           <a:p>
             <a:fld id="{6383FAE1-13DE-4511-8C1B-C8AFB720664C}" type="datetimeFigureOut">
               <a:rPr lang="en-US" smtClean="0"/>
-              <a:t>7/6/2026</a:t>
+              <a:t>8/25/2026</a:t>
             </a:fld>
             <a:endParaRPr lang="en-US"/>
           </a:p>
@@ -861,7 +861,7 @@
           <a:p>
             <a:fld id="{6383FAE1-13DE-4511-8C1B-C8AFB720664C}" type="datetimeFigureOut">
               <a:rPr lang="en-US" smtClean="0"/>
-              <a:t>7/6/2026</a:t>
+              <a:t>8/25/2026</a:t>
             </a:fld>
             <a:endParaRPr lang="en-US"/>
           </a:p>
@@ -1059,7 +1059,7 @@
           <a:p>
             <a:fld id="{6383FAE1-13DE-4511-8C1B-C8AFB720664C}" type="datetimeFigureOut">
               <a:rPr lang="en-US" smtClean="0"/>
-              <a:t>7/6/2026</a:t>
+              <a:t>8/25/2026</a:t>
             </a:fld>
             <a:endParaRPr lang="en-US"/>
           </a:p>
@@ -1334,7 +1334,7 @@
           <a:p>
             <a:fld id="{6383FAE1-13DE-4511-8C1B-C8AFB720664C}" type="datetimeFigureOut">
               <a:rPr lang="en-US" smtClean="0"/>
-              <a:t>7/6/2026</a:t>
+              <a:t>8/25/2026</a:t>
             </a:fld>
             <a:endParaRPr lang="en-US"/>
           </a:p>
@@ -1599,7 +1599,7 @@
           <a:p>
             <a:fld id="{6383FAE1-13DE-4511-8C1B-C8AFB720664C}" type="datetimeFigureOut">
               <a:rPr lang="en-US" smtClean="0"/>
-              <a:t>7/6/2026</a:t>
+              <a:t>8/25/2026</a:t>
             </a:fld>
             <a:endParaRPr lang="en-US"/>
           </a:p>
@@ -2011,7 +2011,7 @@
           <a:p>
             <a:fld id="{6383FAE1-13DE-4511-8C1B-C8AFB720664C}" type="datetimeFigureOut">
               <a:rPr lang="en-US" smtClean="0"/>
-              <a:t>7/6/2026</a:t>
+              <a:t>8/25/2026</a:t>
             </a:fld>
             <a:endParaRPr lang="en-US"/>
           </a:p>
@@ -2152,7 +2152,7 @@
           <a:p>
             <a:fld id="{6383FAE1-13DE-4511-8C1B-C8AFB720664C}" type="datetimeFigureOut">
               <a:rPr lang="en-US" smtClean="0"/>
-              <a:t>7/6/2026</a:t>
+              <a:t>8/25/2026</a:t>
             </a:fld>
             <a:endParaRPr lang="en-US"/>
           </a:p>
@@ -2265,7 +2265,7 @@
           <a:p>
             <a:fld id="{6383FAE1-13DE-4511-8C1B-C8AFB720664C}" type="datetimeFigureOut">
               <a:rPr lang="en-US" smtClean="0"/>
-              <a:t>7/6/2026</a:t>
+              <a:t>8/25/2026</a:t>
             </a:fld>
             <a:endParaRPr lang="en-US"/>
           </a:p>
@@ -2576,7 +2576,7 @@
           <a:p>
             <a:fld id="{6383FAE1-13DE-4511-8C1B-C8AFB720664C}" type="datetimeFigureOut">
               <a:rPr lang="en-US" smtClean="0"/>
-              <a:t>7/6/2026</a:t>
+              <a:t>8/25/2026</a:t>
             </a:fld>
             <a:endParaRPr lang="en-US"/>
           </a:p>
@@ -2867,7 +2867,7 @@
           <a:p>
             <a:fld id="{6383FAE1-13DE-4511-8C1B-C8AFB720664C}" type="datetimeFigureOut">
               <a:rPr lang="en-US" smtClean="0"/>
-              <a:t>7/6/2026</a:t>
+              <a:t>8/25/2026</a:t>
             </a:fld>
             <a:endParaRPr lang="en-US"/>
           </a:p>
@@ -3111,7 +3111,7 @@
           <a:p>
             <a:fld id="{6383FAE1-13DE-4511-8C1B-C8AFB720664C}" type="datetimeFigureOut">
               <a:rPr lang="en-US" smtClean="0"/>
-              <a:t>7/6/2026</a:t>
+              <a:t>8/25/2026</a:t>
             </a:fld>
             <a:endParaRPr lang="en-US"/>
           </a:p>
@@ -3720,7 +3720,7 @@
         </p:nvSpPr>
         <p:spPr>
           <a:xfrm>
-            <a:off x="731520" y="2555748"/>
+            <a:off x="731520" y="3140964"/>
             <a:ext cx="1435608" cy="676656"/>
           </a:xfrm>
           <a:prstGeom prst="rect">
@@ -3768,7 +3768,7 @@
         </p:nvSpPr>
         <p:spPr>
           <a:xfrm>
-            <a:off x="2875934" y="2510028"/>
+            <a:off x="2875934" y="3095244"/>
             <a:ext cx="2974848" cy="809244"/>
           </a:xfrm>
           <a:prstGeom prst="rect">
@@ -3828,7 +3828,7 @@
         </p:nvSpPr>
         <p:spPr>
           <a:xfrm>
-            <a:off x="2311908" y="2752344"/>
+            <a:off x="2311908" y="3337560"/>
             <a:ext cx="574548" cy="283464"/>
           </a:xfrm>
           <a:prstGeom prst="rightArrow">
@@ -3874,7 +3874,7 @@
         </p:nvSpPr>
         <p:spPr>
           <a:xfrm>
-            <a:off x="156972" y="2752344"/>
+            <a:off x="156972" y="3337560"/>
             <a:ext cx="429768" cy="283464"/>
           </a:xfrm>
           <a:prstGeom prst="rightArrow">
@@ -3920,7 +3920,60 @@
         </p:nvSpPr>
         <p:spPr>
           <a:xfrm>
-            <a:off x="5702808" y="4116324"/>
+            <a:off x="5985132" y="5440938"/>
+            <a:ext cx="3166872" cy="676656"/>
+          </a:xfrm>
+          <a:prstGeom prst="rect">
+            <a:avLst/>
+          </a:prstGeom>
+          <a:solidFill>
+            <a:schemeClr val="bg2">
+              <a:lumMod val="75000"/>
+            </a:schemeClr>
+          </a:solidFill>
+        </p:spPr>
+        <p:style>
+          <a:lnRef idx="2">
+            <a:schemeClr val="accent1">
+              <a:shade val="15000"/>
+            </a:schemeClr>
+          </a:lnRef>
+          <a:fillRef idx="1">
+            <a:schemeClr val="accent1"/>
+          </a:fillRef>
+          <a:effectRef idx="0">
+            <a:schemeClr val="accent1"/>
+          </a:effectRef>
+          <a:fontRef idx="minor">
+            <a:schemeClr val="lt1"/>
+          </a:fontRef>
+        </p:style>
+        <p:txBody>
+          <a:bodyPr rtlCol="0" anchor="ctr"/>
+          <a:lstStyle/>
+          <a:p>
+            <a:r>
+              <a:rPr lang="en-US" dirty="0"/>
+              <a:t>Prints the mean, standard deviation, etc.</a:t>
+            </a:r>
+          </a:p>
+        </p:txBody>
+      </p:sp>
+      <p:sp>
+        <p:nvSpPr>
+          <p:cNvPr id="7" name="Rectangle 6">
+            <a:extLst>
+              <a:ext uri="{FF2B5EF4-FFF2-40B4-BE49-F238E27FC236}">
+                <a16:creationId xmlns:a16="http://schemas.microsoft.com/office/drawing/2014/main" id="{1CD9338C-35FA-940A-8499-8932500ACF6C}"/>
+              </a:ext>
+            </a:extLst>
+          </p:cNvPr>
+          <p:cNvSpPr/>
+          <p:nvPr/>
+        </p:nvSpPr>
+        <p:spPr>
+          <a:xfrm>
+            <a:off x="6661986" y="3097296"/>
             <a:ext cx="3166872" cy="676656"/>
           </a:xfrm>
           <a:prstGeom prst="rect">
@@ -3949,17 +4002,17 @@
           <a:p>
             <a:r>
               <a:rPr lang="en-US" dirty="0"/>
-              <a:t>Prints the mean, standard deviation, etc.</a:t>
-            </a:r>
-          </a:p>
-        </p:txBody>
-      </p:sp>
-      <p:sp>
-        <p:nvSpPr>
-          <p:cNvPr id="7" name="Rectangle 6">
-            <a:extLst>
-              <a:ext uri="{FF2B5EF4-FFF2-40B4-BE49-F238E27FC236}">
-                <a16:creationId xmlns:a16="http://schemas.microsoft.com/office/drawing/2014/main" id="{1CD9338C-35FA-940A-8499-8932500ACF6C}"/>
+              <a:t>Plot heatmap and save PNG file</a:t>
+            </a:r>
+          </a:p>
+        </p:txBody>
+      </p:sp>
+      <p:sp>
+        <p:nvSpPr>
+          <p:cNvPr id="8" name="Arrow: Right 7">
+            <a:extLst>
+              <a:ext uri="{FF2B5EF4-FFF2-40B4-BE49-F238E27FC236}">
+                <a16:creationId xmlns:a16="http://schemas.microsoft.com/office/drawing/2014/main" id="{A186BA38-D926-4823-319C-FDC7AD942A0D}"/>
               </a:ext>
             </a:extLst>
           </p:cNvPr>
@@ -3968,55 +4021,7 @@
         </p:nvSpPr>
         <p:spPr>
           <a:xfrm>
-            <a:off x="6670548" y="2576322"/>
-            <a:ext cx="3166872" cy="676656"/>
-          </a:xfrm>
-          <a:prstGeom prst="rect">
-            <a:avLst/>
-          </a:prstGeom>
-        </p:spPr>
-        <p:style>
-          <a:lnRef idx="2">
-            <a:schemeClr val="accent1">
-              <a:shade val="15000"/>
-            </a:schemeClr>
-          </a:lnRef>
-          <a:fillRef idx="1">
-            <a:schemeClr val="accent1"/>
-          </a:fillRef>
-          <a:effectRef idx="0">
-            <a:schemeClr val="accent1"/>
-          </a:effectRef>
-          <a:fontRef idx="minor">
-            <a:schemeClr val="lt1"/>
-          </a:fontRef>
-        </p:style>
-        <p:txBody>
-          <a:bodyPr rtlCol="0" anchor="ctr"/>
-          <a:lstStyle/>
-          <a:p>
-            <a:r>
-              <a:rPr lang="en-US" dirty="0"/>
-              <a:t>Plot heatmap and save PNG file</a:t>
-            </a:r>
-          </a:p>
-        </p:txBody>
-      </p:sp>
-      <p:sp>
-        <p:nvSpPr>
-          <p:cNvPr id="8" name="Arrow: Right 7">
-            <a:extLst>
-              <a:ext uri="{FF2B5EF4-FFF2-40B4-BE49-F238E27FC236}">
-                <a16:creationId xmlns:a16="http://schemas.microsoft.com/office/drawing/2014/main" id="{A186BA38-D926-4823-319C-FDC7AD942A0D}"/>
-              </a:ext>
-            </a:extLst>
-          </p:cNvPr>
-          <p:cNvSpPr/>
-          <p:nvPr/>
-        </p:nvSpPr>
-        <p:spPr>
-          <a:xfrm>
-            <a:off x="5985132" y="2850408"/>
+            <a:off x="5985132" y="3435624"/>
             <a:ext cx="574548" cy="283464"/>
           </a:xfrm>
           <a:prstGeom prst="rightArrow">
@@ -4062,8 +4067,8 @@
         </p:nvSpPr>
         <p:spPr>
           <a:xfrm rot="3176949">
-            <a:off x="5556951" y="3541143"/>
-            <a:ext cx="741001" cy="283464"/>
+            <a:off x="5384382" y="4472865"/>
+            <a:ext cx="1609328" cy="283464"/>
           </a:xfrm>
           <a:prstGeom prst="rightArrow">
             <a:avLst/>
@@ -4108,12 +4113,17 @@
         </p:nvSpPr>
         <p:spPr>
           <a:xfrm>
-            <a:off x="10347960" y="2151126"/>
+            <a:off x="10567416" y="2657603"/>
             <a:ext cx="1435608" cy="676656"/>
           </a:xfrm>
           <a:prstGeom prst="rect">
             <a:avLst/>
           </a:prstGeom>
+          <a:solidFill>
+            <a:schemeClr val="bg2">
+              <a:lumMod val="75000"/>
+            </a:schemeClr>
+          </a:solidFill>
         </p:spPr>
         <p:style>
           <a:lnRef idx="2">
@@ -4156,12 +4166,17 @@
         </p:nvSpPr>
         <p:spPr>
           <a:xfrm>
-            <a:off x="10195560" y="3451860"/>
+            <a:off x="10335768" y="4315875"/>
             <a:ext cx="1667256" cy="676656"/>
           </a:xfrm>
           <a:prstGeom prst="rect">
             <a:avLst/>
           </a:prstGeom>
+          <a:solidFill>
+            <a:schemeClr val="bg2">
+              <a:lumMod val="75000"/>
+            </a:schemeClr>
+          </a:solidFill>
         </p:spPr>
         <p:style>
           <a:lnRef idx="2">
@@ -4204,8 +4219,8 @@
         </p:nvSpPr>
         <p:spPr>
           <a:xfrm rot="19856372">
-            <a:off x="9899683" y="2719155"/>
-            <a:ext cx="423929" cy="283464"/>
+            <a:off x="9886722" y="3254363"/>
+            <a:ext cx="629837" cy="283464"/>
           </a:xfrm>
           <a:prstGeom prst="rightArrow">
             <a:avLst/>
@@ -4250,8 +4265,8 @@
         </p:nvSpPr>
         <p:spPr>
           <a:xfrm rot="2366231">
-            <a:off x="9844007" y="3125447"/>
-            <a:ext cx="406004" cy="283464"/>
+            <a:off x="9816147" y="3788391"/>
+            <a:ext cx="650729" cy="283464"/>
           </a:xfrm>
           <a:prstGeom prst="rightArrow">
             <a:avLst/>
@@ -4296,7 +4311,7 @@
         </p:nvSpPr>
         <p:spPr>
           <a:xfrm>
-            <a:off x="2301138" y="2352234"/>
+            <a:off x="2301138" y="2937450"/>
             <a:ext cx="397866" cy="400110"/>
           </a:xfrm>
           <a:prstGeom prst="rect">
@@ -4346,7 +4361,7 @@
         </p:nvSpPr>
         <p:spPr>
           <a:xfrm>
-            <a:off x="6160008" y="2286316"/>
+            <a:off x="6160008" y="2871532"/>
             <a:ext cx="397866" cy="400110"/>
           </a:xfrm>
           <a:prstGeom prst="rect">
@@ -4396,7 +4411,7 @@
         </p:nvSpPr>
         <p:spPr>
           <a:xfrm>
-            <a:off x="9861009" y="2387196"/>
+            <a:off x="9920148" y="2972412"/>
             <a:ext cx="397866" cy="400110"/>
           </a:xfrm>
           <a:prstGeom prst="rect">
@@ -4446,7 +4461,7 @@
         </p:nvSpPr>
         <p:spPr>
           <a:xfrm>
-            <a:off x="10094892" y="2951376"/>
+            <a:off x="10136835" y="3544371"/>
             <a:ext cx="397866" cy="400110"/>
           </a:xfrm>
           <a:prstGeom prst="rect">
@@ -4496,7 +4511,7 @@
         </p:nvSpPr>
         <p:spPr>
           <a:xfrm>
-            <a:off x="5938622" y="3251805"/>
+            <a:off x="6272682" y="4375404"/>
             <a:ext cx="397866" cy="400110"/>
           </a:xfrm>
           <a:prstGeom prst="rect">
@@ -4546,7 +4561,7 @@
         </p:nvSpPr>
         <p:spPr>
           <a:xfrm>
-            <a:off x="113039" y="2387196"/>
+            <a:off x="113039" y="2972412"/>
             <a:ext cx="596638" cy="400110"/>
           </a:xfrm>
           <a:prstGeom prst="rect">
@@ -4588,8 +4603,8 @@
         </p:nvSpPr>
         <p:spPr>
           <a:xfrm>
-            <a:off x="2167128" y="1005745"/>
-            <a:ext cx="6643998" cy="400110"/>
+            <a:off x="1764837" y="114976"/>
+            <a:ext cx="9589805" cy="2308324"/>
           </a:xfrm>
           <a:prstGeom prst="rect">
             <a:avLst/>
@@ -4603,7 +4618,7 @@
           <a:lstStyle/>
           <a:p>
             <a:r>
-              <a:rPr lang="en-US" sz="2000" dirty="0">
+              <a:rPr lang="en-US" sz="2400" dirty="0">
                 <a:solidFill>
                   <a:schemeClr val="accent6">
                     <a:lumMod val="60000"/>
@@ -4611,7 +4626,78 @@
                   </a:schemeClr>
                 </a:solidFill>
               </a:rPr>
-              <a:t>Write a series of smaller prompts that performs following task</a:t>
+              <a:t>Design a program that takes input a URL of a data file, and </a:t>
+            </a:r>
+          </a:p>
+          <a:p>
+            <a:pPr marL="457200" indent="-457200">
+              <a:buAutoNum type="arabicParenR"/>
+            </a:pPr>
+            <a:r>
+              <a:rPr lang="en-US" sz="2400" dirty="0">
+                <a:solidFill>
+                  <a:schemeClr val="accent6">
+                    <a:lumMod val="60000"/>
+                    <a:lumOff val="40000"/>
+                  </a:schemeClr>
+                </a:solidFill>
+              </a:rPr>
+              <a:t>it saves a plot for heatmap for numerical  data</a:t>
+            </a:r>
+          </a:p>
+          <a:p>
+            <a:pPr marL="457200" indent="-457200">
+              <a:buAutoNum type="arabicParenR"/>
+            </a:pPr>
+            <a:r>
+              <a:rPr lang="en-US" sz="2400" dirty="0">
+                <a:solidFill>
+                  <a:schemeClr val="accent6">
+                    <a:lumMod val="60000"/>
+                    <a:lumOff val="40000"/>
+                  </a:schemeClr>
+                </a:solidFill>
+              </a:rPr>
+              <a:t>Save the numerical data in excel and in parquet</a:t>
+            </a:r>
+          </a:p>
+          <a:p>
+            <a:pPr marL="457200" indent="-457200">
+              <a:buAutoNum type="arabicParenR"/>
+            </a:pPr>
+            <a:r>
+              <a:rPr lang="en-US" sz="2400" dirty="0">
+                <a:solidFill>
+                  <a:schemeClr val="accent6">
+                    <a:lumMod val="60000"/>
+                    <a:lumOff val="40000"/>
+                  </a:schemeClr>
+                </a:solidFill>
+              </a:rPr>
+              <a:t>Prints the mean, standard deviation, and other descriptive stats. </a:t>
+            </a:r>
+          </a:p>
+          <a:p>
+            <a:endParaRPr lang="en-US" sz="2400" dirty="0">
+              <a:solidFill>
+                <a:schemeClr val="accent6">
+                  <a:lumMod val="60000"/>
+                  <a:lumOff val="40000"/>
+                </a:schemeClr>
+              </a:solidFill>
+            </a:endParaRPr>
+          </a:p>
+          <a:p>
+            <a:r>
+              <a:rPr lang="en-US" sz="2400" dirty="0">
+                <a:solidFill>
+                  <a:schemeClr val="accent6">
+                    <a:lumMod val="60000"/>
+                    <a:lumOff val="40000"/>
+                  </a:schemeClr>
+                </a:solidFill>
+              </a:rPr>
+              <a:t>To do above , write a series of smaller prompts that performs following task</a:t>
             </a:r>
           </a:p>
         </p:txBody>
@@ -4630,7 +4716,7 @@
         </p:nvSpPr>
         <p:spPr>
           <a:xfrm>
-            <a:off x="5830832" y="2519330"/>
+            <a:off x="5830832" y="3104546"/>
             <a:ext cx="865943" cy="400110"/>
           </a:xfrm>
           <a:prstGeom prst="rect">
